--- a/public/fun/pack/pptx/birthday/돌잔치_27_돌잡이중심_한가위달.pptx
+++ b/public/fun/pack/pptx/birthday/돌잔치_27_돌잡이중심_한가위달.pptx
@@ -3286,6 +3286,14 @@
 <file path=ppt/slides/slide1.xml><?xml version="1.0" encoding="utf-8"?>
 <p:sld xmlns:a="http://schemas.openxmlformats.org/drawingml/2006/main" xmlns:p="http://schemas.openxmlformats.org/presentationml/2006/main" xmlns:r="http://schemas.openxmlformats.org/officeDocument/2006/relationships">
   <p:cSld>
+    <p:bg>
+      <p:bgPr>
+        <a:solidFill>
+          <a:srgbClr val="FBF6EC"/>
+        </a:solidFill>
+        <a:effectLst/>
+      </p:bgPr>
+    </p:bg>
     <p:spTree>
       <p:nvGrpSpPr>
         <p:cNvPr id="1" name=""/>
@@ -3293,30 +3301,120 @@
         <p:nvPr/>
       </p:nvGrpSpPr>
       <p:grpSpPr/>
-      <p:pic>
-        <p:nvPicPr>
-          <p:cNvPr id="3" name="표지 그림" descr="birthday-27.jpg"/>
-          <p:cNvPicPr>
-            <a:picLocks noChangeAspect="1"/>
-          </p:cNvPicPr>
+      <p:sp>
+        <p:nvSpPr>
+          <p:cNvPr id="3" name="사진 자리"/>
+          <p:cNvSpPr/>
           <p:nvPr/>
-        </p:nvPicPr>
-        <p:blipFill>
-          <a:blip r:embed="rId2"/>
-          <a:stretch>
-            <a:fillRect/>
-          </a:stretch>
-        </p:blipFill>
-        <p:spPr>
-          <a:xfrm>
-            <a:off x="0" y="0"/>
-            <a:ext cx="12191695" cy="6858000"/>
+        </p:nvSpPr>
+        <p:spPr>
+          <a:xfrm>
+            <a:off x="1463003" y="960120"/>
+            <a:ext cx="3657508" cy="4526280"/>
+          </a:xfrm>
+          <a:prstGeom prst="roundRect">
+            <a:avLst>
+              <a:gd name="adj" fmla="val 4000"/>
+            </a:avLst>
+          </a:prstGeom>
+          <a:solidFill>
+            <a:srgbClr val="EBD6AD"/>
+          </a:solidFill>
+          <a:ln>
+            <a:noFill/>
+          </a:ln>
+        </p:spPr>
+        <p:txBody>
+          <a:bodyPr rtlCol="0" anchor="ctr" wrap="square" lIns="54864" rIns="54864" tIns="27432" bIns="27432">
+            <a:noAutofit/>
+          </a:bodyPr>
+          <a:lstStyle/>
+          <a:p>
+            <a:pPr algn="ctr">
+              <a:lnSpc>
+                <a:spcPct val="100000"/>
+              </a:lnSpc>
+            </a:pPr>
+            <a:r>
+              <a:rPr sz="1400" b="0" i="0">
+                <a:solidFill>
+                  <a:srgbClr val="493E27"/>
+                </a:solidFill>
+              </a:rPr>
+              <a:t>사진을 넣어 주세요</a:t>
+            </a:r>
+          </a:p>
+        </p:txBody>
+      </p:sp>
+      <p:sp>
+        <p:nvSpPr>
+          <p:cNvPr id="4" name="장식"/>
+          <p:cNvSpPr/>
+          <p:nvPr/>
+        </p:nvSpPr>
+        <p:spPr>
+          <a:xfrm>
+            <a:off x="975335" y="1234439"/>
+            <a:ext cx="3657508" cy="4526280"/>
+          </a:xfrm>
+          <a:prstGeom prst="roundRect">
+            <a:avLst>
+              <a:gd name="adj" fmla="val 4000"/>
+            </a:avLst>
+          </a:prstGeom>
+          <a:noFill/>
+          <a:ln w="9525">
+            <a:solidFill>
+              <a:srgbClr val="26231F"/>
+            </a:solidFill>
+          </a:ln>
+        </p:spPr>
+        <p:txBody>
+          <a:bodyPr rtlCol="0" anchor="ctr"/>
+          <a:lstStyle/>
+          <a:p>
+            <a:pPr algn="ctr"/>
+          </a:p>
+        </p:txBody>
+      </p:sp>
+      <p:sp>
+        <p:nvSpPr>
+          <p:cNvPr id="5" name="라벨"/>
+          <p:cNvSpPr txBox="1"/>
+          <p:nvPr/>
+        </p:nvSpPr>
+        <p:spPr>
+          <a:xfrm>
+            <a:off x="6827349" y="2148840"/>
+            <a:ext cx="4632844" cy="274320"/>
           </a:xfrm>
           <a:prstGeom prst="rect">
             <a:avLst/>
           </a:prstGeom>
-        </p:spPr>
-      </p:pic>
+          <a:noFill/>
+        </p:spPr>
+        <p:txBody>
+          <a:bodyPr wrap="square" lIns="54864" rIns="54864" tIns="27432" bIns="27432" anchor="t">
+            <a:noAutofit/>
+          </a:bodyPr>
+          <a:lstStyle/>
+          <a:p>
+            <a:pPr algn="l">
+              <a:lnSpc>
+                <a:spcPct val="115000"/>
+              </a:lnSpc>
+            </a:pPr>
+            <a:r>
+              <a:rPr sz="1000" b="1" i="0" spc="250">
+                <a:solidFill>
+                  <a:srgbClr val="26231F"/>
+                </a:solidFill>
+              </a:rPr>
+              <a:t>FIRST BIRTHDAY</a:t>
+            </a:r>
+          </a:p>
+        </p:txBody>
+      </p:sp>
       <p:sp>
         <p:nvSpPr>
           <p:cNvPr id="2" name="Title 1"/>
@@ -3329,8 +3427,8 @@
         </p:nvSpPr>
         <p:spPr>
           <a:xfrm>
-            <a:off x="853418" y="2057400"/>
-            <a:ext cx="6095847" cy="1554480"/>
+            <a:off x="6827349" y="2606040"/>
+            <a:ext cx="4632844" cy="1188720"/>
           </a:xfrm>
         </p:spPr>
         <p:txBody>
@@ -3347,7 +3445,7 @@
             <a:r>
               <a:rPr sz="4000" b="1" i="0">
                 <a:solidFill>
-                  <a:srgbClr val="715214"/>
+                  <a:srgbClr val="26231F"/>
                 </a:solidFill>
               </a:rPr>
               <a:t>첫 번째 생일</a:t>
@@ -3357,14 +3455,14 @@
       </p:sp>
       <p:sp>
         <p:nvSpPr>
-          <p:cNvPr id="4" name="한 줄 문구"/>
+          <p:cNvPr id="6" name="한 줄 문구"/>
           <p:cNvSpPr txBox="1"/>
           <p:nvPr/>
         </p:nvSpPr>
         <p:spPr>
           <a:xfrm>
-            <a:off x="853418" y="3749039"/>
-            <a:ext cx="6095847" cy="822960"/>
+            <a:off x="6827349" y="3886200"/>
+            <a:ext cx="4632844" cy="822960"/>
           </a:xfrm>
           <a:prstGeom prst="rect">
             <a:avLst/>
@@ -3383,9 +3481,9 @@
               </a:lnSpc>
             </a:pPr>
             <a:r>
-              <a:rPr sz="1700" b="0" i="1">
+              <a:rPr sz="1700" b="0" i="0">
                 <a:solidFill>
-                  <a:srgbClr val="715214"/>
+                  <a:srgbClr val="26231F"/>
                 </a:solidFill>
               </a:rPr>
               <a:t>결과는 사진으로 남겨 두겠습니다</a:t>
@@ -3395,14 +3493,14 @@
       </p:sp>
       <p:sp>
         <p:nvSpPr>
-          <p:cNvPr id="5" name="안내 문구"/>
+          <p:cNvPr id="7" name="안내 문구"/>
           <p:cNvSpPr txBox="1"/>
           <p:nvPr/>
         </p:nvSpPr>
         <p:spPr>
           <a:xfrm>
-            <a:off x="853418" y="4617720"/>
-            <a:ext cx="6095847" cy="914400"/>
+            <a:off x="6827349" y="4754880"/>
+            <a:ext cx="4632844" cy="914400"/>
           </a:xfrm>
           <a:prstGeom prst="rect">
             <a:avLst/>
@@ -3423,10 +3521,10 @@
             <a:r>
               <a:rPr sz="1400" b="0" i="0">
                 <a:solidFill>
-                  <a:srgbClr val="666666"/>
+                  <a:srgbClr val="26231F"/>
                 </a:solidFill>
               </a:rPr>
-              <a:t>아기 이름 · 2027. 00. 00</a:t>
+              <a:t>아기 이름 · 날짜 입력</a:t>
             </a:r>
           </a:p>
           <a:p>
@@ -3438,7 +3536,7 @@
             <a:r>
               <a:rPr sz="1400" b="0" i="0">
                 <a:solidFill>
-                  <a:srgbClr val="666666"/>
+                  <a:srgbClr val="26231F"/>
                 </a:solidFill>
               </a:rPr>
               <a:t>장소를 입력하세요</a:t>
@@ -3460,7 +3558,7 @@
     <p:bg>
       <p:bgPr>
         <a:solidFill>
-          <a:srgbClr val="F7E8C9"/>
+          <a:srgbClr val="FFFFFF"/>
         </a:solidFill>
         <a:effectLst/>
       </p:bgPr>
@@ -3480,20 +3578,84 @@
         </p:nvSpPr>
         <p:spPr>
           <a:xfrm>
-            <a:off x="274320" y="274320"/>
-            <a:ext cx="11643055" cy="6309360"/>
+            <a:off x="10180015" y="-1645920"/>
+            <a:ext cx="3474720" cy="3474720"/>
+          </a:xfrm>
+          <a:prstGeom prst="ellipse">
+            <a:avLst/>
+          </a:prstGeom>
+          <a:solidFill>
+            <a:srgbClr val="EBD6AD"/>
+          </a:solidFill>
+          <a:ln>
+            <a:noFill/>
+          </a:ln>
+        </p:spPr>
+        <p:txBody>
+          <a:bodyPr rtlCol="0" anchor="ctr"/>
+          <a:lstStyle/>
+          <a:p>
+            <a:pPr algn="ctr"/>
+          </a:p>
+        </p:txBody>
+      </p:sp>
+      <p:sp>
+        <p:nvSpPr>
+          <p:cNvPr id="4" name="상단 라벨"/>
+          <p:cNvSpPr txBox="1"/>
+          <p:nvPr/>
+        </p:nvSpPr>
+        <p:spPr>
+          <a:xfrm>
+            <a:off x="640080" y="274320"/>
+            <a:ext cx="5486400" cy="274320"/>
           </a:xfrm>
           <a:prstGeom prst="rect">
+            <a:avLst/>
+          </a:prstGeom>
+          <a:noFill/>
+        </p:spPr>
+        <p:txBody>
+          <a:bodyPr wrap="square" lIns="54864" rIns="54864" tIns="27432" bIns="27432" anchor="ctr">
+            <a:noAutofit/>
+          </a:bodyPr>
+          <a:lstStyle/>
+          <a:p>
+            <a:pPr algn="l">
+              <a:lnSpc>
+                <a:spcPct val="115000"/>
+              </a:lnSpc>
+            </a:pPr>
+            <a:r>
+              <a:rPr sz="900" b="1" i="0" spc="250">
+                <a:solidFill>
+                  <a:srgbClr val="26231F"/>
+                </a:solidFill>
+              </a:rPr>
+              <a:t>FIRST BIRTHDAY</a:t>
+            </a:r>
+          </a:p>
+        </p:txBody>
+      </p:sp>
+      <p:sp>
+        <p:nvSpPr>
+          <p:cNvPr id="5" name="포인트"/>
+          <p:cNvSpPr/>
+          <p:nvPr/>
+        </p:nvSpPr>
+        <p:spPr>
+          <a:xfrm>
+            <a:off x="11048695" y="502919"/>
+            <a:ext cx="274320" cy="274320"/>
+          </a:xfrm>
+          <a:prstGeom prst="ellipse">
             <a:avLst/>
           </a:prstGeom>
           <a:solidFill>
             <a:srgbClr val="FFFFFF"/>
           </a:solidFill>
-          <a:ln w="25400">
-            <a:solidFill>
-              <a:srgbClr val="C79123"/>
-            </a:solidFill>
-            <a:prstDash val="dash"/>
+          <a:ln>
+            <a:noFill/>
           </a:ln>
         </p:spPr>
         <p:txBody>
@@ -3516,8 +3678,8 @@
         </p:nvSpPr>
         <p:spPr>
           <a:xfrm>
-            <a:off x="777240" y="548640"/>
-            <a:ext cx="9357055" cy="822960"/>
+            <a:off x="640080" y="658368"/>
+            <a:ext cx="9082735" cy="868680"/>
           </a:xfrm>
         </p:spPr>
         <p:txBody>
@@ -3534,7 +3696,7 @@
             <a:r>
               <a:rPr sz="3000" b="1" i="0">
                 <a:solidFill>
-                  <a:srgbClr val="715214"/>
+                  <a:srgbClr val="26231F"/>
                 </a:solidFill>
               </a:rPr>
               <a:t>우리 아기를 소개합니다</a:t>
@@ -3544,14 +3706,14 @@
       </p:sp>
       <p:sp>
         <p:nvSpPr>
-          <p:cNvPr id="4" name="사진 자리"/>
+          <p:cNvPr id="6" name="사진 자리"/>
           <p:cNvSpPr/>
           <p:nvPr/>
         </p:nvSpPr>
         <p:spPr>
           <a:xfrm>
-            <a:off x="777240" y="1554480"/>
-            <a:ext cx="3840480" cy="4480559"/>
+            <a:off x="640080" y="1783080"/>
+            <a:ext cx="3840480" cy="4389120"/>
           </a:xfrm>
           <a:prstGeom prst="roundRect">
             <a:avLst>
@@ -3559,12 +3721,10 @@
             </a:avLst>
           </a:prstGeom>
           <a:solidFill>
-            <a:srgbClr val="F7E8C9"/>
+            <a:srgbClr val="F6EBD5"/>
           </a:solidFill>
           <a:ln w="19050">
-            <a:solidFill>
-              <a:srgbClr val="C79123"/>
-            </a:solidFill>
+            <a:noFill/>
             <a:prstDash val="dash"/>
           </a:ln>
         </p:spPr>
@@ -3582,7 +3742,7 @@
             <a:r>
               <a:rPr sz="1400" b="0" i="0">
                 <a:solidFill>
-                  <a:srgbClr val="715214"/>
+                  <a:srgbClr val="8E8780"/>
                 </a:solidFill>
               </a:rPr>
               <a:t>아기 사진을 넣어 주세요</a:t>
@@ -3592,15 +3752,15 @@
       </p:sp>
       <p:graphicFrame>
         <p:nvGraphicFramePr>
-          <p:cNvPr id="5" name="표"/>
+          <p:cNvPr id="7" name="표"/>
           <p:cNvGraphicFramePr>
             <a:graphicFrameLocks noGrp="1"/>
           </p:cNvGraphicFramePr>
           <p:nvPr/>
         </p:nvGraphicFramePr>
         <p:xfrm>
-          <a:off x="4983479" y="1554480"/>
-          <a:ext cx="6430975" cy="3950208"/>
+          <a:off x="4846320" y="1783080"/>
+          <a:ext cx="6705295" cy="3950208"/>
         </p:xfrm>
         <a:graphic>
           <a:graphicData uri="http://schemas.openxmlformats.org/drawingml/2006/table">
@@ -3610,7 +3770,7 @@
               </a:tblPr>
               <a:tblGrid>
                 <a:gridCol w="1828800"/>
-                <a:gridCol w="4602175"/>
+                <a:gridCol w="4876495"/>
               </a:tblGrid>
               <a:tr h="658368">
                 <a:tc>
@@ -3622,7 +3782,7 @@
                       <a:r>
                         <a:rPr sz="1500" b="1">
                           <a:solidFill>
-                            <a:srgbClr val="715214"/>
+                            <a:srgbClr val="493E27"/>
                           </a:solidFill>
                         </a:rPr>
                         <a:t>이름</a:t>
@@ -3632,30 +3792,30 @@
                   <a:tcPr anchor="ctr" marL="73152" marR="73152">
                     <a:lnL w="9525" cap="flat" cmpd="sng" algn="ctr">
                       <a:solidFill>
-                        <a:srgbClr val="F7E8C9"/>
+                        <a:srgbClr val="F6EBD5"/>
                       </a:solidFill>
                       <a:prstDash val="solid"/>
                     </a:lnL>
                     <a:lnR w="9525" cap="flat" cmpd="sng" algn="ctr">
                       <a:solidFill>
-                        <a:srgbClr val="F7E8C9"/>
+                        <a:srgbClr val="F6EBD5"/>
                       </a:solidFill>
                       <a:prstDash val="solid"/>
                     </a:lnR>
                     <a:lnT w="9525" cap="flat" cmpd="sng" algn="ctr">
                       <a:solidFill>
-                        <a:srgbClr val="F7E8C9"/>
+                        <a:srgbClr val="F6EBD5"/>
                       </a:solidFill>
                       <a:prstDash val="solid"/>
                     </a:lnT>
                     <a:lnB w="9525" cap="flat" cmpd="sng" algn="ctr">
                       <a:solidFill>
-                        <a:srgbClr val="F7E8C9"/>
+                        <a:srgbClr val="F6EBD5"/>
                       </a:solidFill>
                       <a:prstDash val="solid"/>
                     </a:lnB>
                     <a:solidFill>
-                      <a:srgbClr val="F7E8C9"/>
+                      <a:srgbClr val="F6EBD5"/>
                     </a:solidFill>
                   </a:tcPr>
                 </a:tc>
@@ -3668,7 +3828,7 @@
                       <a:r>
                         <a:rPr sz="1500" b="0">
                           <a:solidFill>
-                            <a:srgbClr val="2B2B2B"/>
+                            <a:srgbClr val="26231F"/>
                           </a:solidFill>
                         </a:rPr>
                         <a:t>입력하세요</a:t>
@@ -3678,30 +3838,30 @@
                   <a:tcPr anchor="ctr" marL="73152" marR="73152">
                     <a:lnL w="9525" cap="flat" cmpd="sng" algn="ctr">
                       <a:solidFill>
-                        <a:srgbClr val="F7E8C9"/>
+                        <a:srgbClr val="F6EBD5"/>
                       </a:solidFill>
                       <a:prstDash val="solid"/>
                     </a:lnL>
                     <a:lnR w="9525" cap="flat" cmpd="sng" algn="ctr">
                       <a:solidFill>
-                        <a:srgbClr val="F7E8C9"/>
+                        <a:srgbClr val="F6EBD5"/>
                       </a:solidFill>
                       <a:prstDash val="solid"/>
                     </a:lnR>
                     <a:lnT w="9525" cap="flat" cmpd="sng" algn="ctr">
                       <a:solidFill>
-                        <a:srgbClr val="F7E8C9"/>
+                        <a:srgbClr val="F6EBD5"/>
                       </a:solidFill>
                       <a:prstDash val="solid"/>
                     </a:lnT>
                     <a:lnB w="9525" cap="flat" cmpd="sng" algn="ctr">
                       <a:solidFill>
-                        <a:srgbClr val="F7E8C9"/>
+                        <a:srgbClr val="F6EBD5"/>
                       </a:solidFill>
                       <a:prstDash val="solid"/>
                     </a:lnB>
                     <a:solidFill>
-                      <a:srgbClr val="FCF7EE"/>
+                      <a:srgbClr val="FBF6EC"/>
                     </a:solidFill>
                   </a:tcPr>
                 </a:tc>
@@ -3716,7 +3876,7 @@
                       <a:r>
                         <a:rPr sz="1500" b="1">
                           <a:solidFill>
-                            <a:srgbClr val="715214"/>
+                            <a:srgbClr val="493E27"/>
                           </a:solidFill>
                         </a:rPr>
                         <a:t>생일</a:t>
@@ -3726,30 +3886,30 @@
                   <a:tcPr anchor="ctr" marL="73152" marR="73152">
                     <a:lnL w="9525" cap="flat" cmpd="sng" algn="ctr">
                       <a:solidFill>
-                        <a:srgbClr val="F7E8C9"/>
+                        <a:srgbClr val="F6EBD5"/>
                       </a:solidFill>
                       <a:prstDash val="solid"/>
                     </a:lnL>
                     <a:lnR w="9525" cap="flat" cmpd="sng" algn="ctr">
                       <a:solidFill>
-                        <a:srgbClr val="F7E8C9"/>
+                        <a:srgbClr val="F6EBD5"/>
                       </a:solidFill>
                       <a:prstDash val="solid"/>
                     </a:lnR>
                     <a:lnT w="9525" cap="flat" cmpd="sng" algn="ctr">
                       <a:solidFill>
-                        <a:srgbClr val="F7E8C9"/>
+                        <a:srgbClr val="F6EBD5"/>
                       </a:solidFill>
                       <a:prstDash val="solid"/>
                     </a:lnT>
                     <a:lnB w="9525" cap="flat" cmpd="sng" algn="ctr">
                       <a:solidFill>
-                        <a:srgbClr val="F7E8C9"/>
+                        <a:srgbClr val="F6EBD5"/>
                       </a:solidFill>
                       <a:prstDash val="solid"/>
                     </a:lnB>
                     <a:solidFill>
-                      <a:srgbClr val="F7E8C9"/>
+                      <a:srgbClr val="F6EBD5"/>
                     </a:solidFill>
                   </a:tcPr>
                 </a:tc>
@@ -3762,7 +3922,7 @@
                       <a:r>
                         <a:rPr sz="1500" b="0">
                           <a:solidFill>
-                            <a:srgbClr val="2B2B2B"/>
+                            <a:srgbClr val="26231F"/>
                           </a:solidFill>
                         </a:rPr>
                         <a:t>입력하세요</a:t>
@@ -3772,25 +3932,25 @@
                   <a:tcPr anchor="ctr" marL="73152" marR="73152">
                     <a:lnL w="9525" cap="flat" cmpd="sng" algn="ctr">
                       <a:solidFill>
-                        <a:srgbClr val="F7E8C9"/>
+                        <a:srgbClr val="F6EBD5"/>
                       </a:solidFill>
                       <a:prstDash val="solid"/>
                     </a:lnL>
                     <a:lnR w="9525" cap="flat" cmpd="sng" algn="ctr">
                       <a:solidFill>
-                        <a:srgbClr val="F7E8C9"/>
+                        <a:srgbClr val="F6EBD5"/>
                       </a:solidFill>
                       <a:prstDash val="solid"/>
                     </a:lnR>
                     <a:lnT w="9525" cap="flat" cmpd="sng" algn="ctr">
                       <a:solidFill>
-                        <a:srgbClr val="F7E8C9"/>
+                        <a:srgbClr val="F6EBD5"/>
                       </a:solidFill>
                       <a:prstDash val="solid"/>
                     </a:lnT>
                     <a:lnB w="9525" cap="flat" cmpd="sng" algn="ctr">
                       <a:solidFill>
-                        <a:srgbClr val="F7E8C9"/>
+                        <a:srgbClr val="F6EBD5"/>
                       </a:solidFill>
                       <a:prstDash val="solid"/>
                     </a:lnB>
@@ -3810,7 +3970,7 @@
                       <a:r>
                         <a:rPr sz="1500" b="1">
                           <a:solidFill>
-                            <a:srgbClr val="715214"/>
+                            <a:srgbClr val="493E27"/>
                           </a:solidFill>
                         </a:rPr>
                         <a:t>키 · 몸무게</a:t>
@@ -3820,30 +3980,30 @@
                   <a:tcPr anchor="ctr" marL="73152" marR="73152">
                     <a:lnL w="9525" cap="flat" cmpd="sng" algn="ctr">
                       <a:solidFill>
-                        <a:srgbClr val="F7E8C9"/>
+                        <a:srgbClr val="F6EBD5"/>
                       </a:solidFill>
                       <a:prstDash val="solid"/>
                     </a:lnL>
                     <a:lnR w="9525" cap="flat" cmpd="sng" algn="ctr">
                       <a:solidFill>
-                        <a:srgbClr val="F7E8C9"/>
+                        <a:srgbClr val="F6EBD5"/>
                       </a:solidFill>
                       <a:prstDash val="solid"/>
                     </a:lnR>
                     <a:lnT w="9525" cap="flat" cmpd="sng" algn="ctr">
                       <a:solidFill>
-                        <a:srgbClr val="F7E8C9"/>
+                        <a:srgbClr val="F6EBD5"/>
                       </a:solidFill>
                       <a:prstDash val="solid"/>
                     </a:lnT>
                     <a:lnB w="9525" cap="flat" cmpd="sng" algn="ctr">
                       <a:solidFill>
-                        <a:srgbClr val="F7E8C9"/>
+                        <a:srgbClr val="F6EBD5"/>
                       </a:solidFill>
                       <a:prstDash val="solid"/>
                     </a:lnB>
                     <a:solidFill>
-                      <a:srgbClr val="F7E8C9"/>
+                      <a:srgbClr val="F6EBD5"/>
                     </a:solidFill>
                   </a:tcPr>
                 </a:tc>
@@ -3856,7 +4016,7 @@
                       <a:r>
                         <a:rPr sz="1500" b="0">
                           <a:solidFill>
-                            <a:srgbClr val="2B2B2B"/>
+                            <a:srgbClr val="26231F"/>
                           </a:solidFill>
                         </a:rPr>
                         <a:t>입력하세요</a:t>
@@ -3866,30 +4026,30 @@
                   <a:tcPr anchor="ctr" marL="73152" marR="73152">
                     <a:lnL w="9525" cap="flat" cmpd="sng" algn="ctr">
                       <a:solidFill>
-                        <a:srgbClr val="F7E8C9"/>
+                        <a:srgbClr val="F6EBD5"/>
                       </a:solidFill>
                       <a:prstDash val="solid"/>
                     </a:lnL>
                     <a:lnR w="9525" cap="flat" cmpd="sng" algn="ctr">
                       <a:solidFill>
-                        <a:srgbClr val="F7E8C9"/>
+                        <a:srgbClr val="F6EBD5"/>
                       </a:solidFill>
                       <a:prstDash val="solid"/>
                     </a:lnR>
                     <a:lnT w="9525" cap="flat" cmpd="sng" algn="ctr">
                       <a:solidFill>
-                        <a:srgbClr val="F7E8C9"/>
+                        <a:srgbClr val="F6EBD5"/>
                       </a:solidFill>
                       <a:prstDash val="solid"/>
                     </a:lnT>
                     <a:lnB w="9525" cap="flat" cmpd="sng" algn="ctr">
                       <a:solidFill>
-                        <a:srgbClr val="F7E8C9"/>
+                        <a:srgbClr val="F6EBD5"/>
                       </a:solidFill>
                       <a:prstDash val="solid"/>
                     </a:lnB>
                     <a:solidFill>
-                      <a:srgbClr val="FCF7EE"/>
+                      <a:srgbClr val="FBF6EC"/>
                     </a:solidFill>
                   </a:tcPr>
                 </a:tc>
@@ -3904,7 +4064,7 @@
                       <a:r>
                         <a:rPr sz="1500" b="1">
                           <a:solidFill>
-                            <a:srgbClr val="715214"/>
+                            <a:srgbClr val="493E27"/>
                           </a:solidFill>
                         </a:rPr>
                         <a:t>좋아하는 것</a:t>
@@ -3914,30 +4074,30 @@
                   <a:tcPr anchor="ctr" marL="73152" marR="73152">
                     <a:lnL w="9525" cap="flat" cmpd="sng" algn="ctr">
                       <a:solidFill>
-                        <a:srgbClr val="F7E8C9"/>
+                        <a:srgbClr val="F6EBD5"/>
                       </a:solidFill>
                       <a:prstDash val="solid"/>
                     </a:lnL>
                     <a:lnR w="9525" cap="flat" cmpd="sng" algn="ctr">
                       <a:solidFill>
-                        <a:srgbClr val="F7E8C9"/>
+                        <a:srgbClr val="F6EBD5"/>
                       </a:solidFill>
                       <a:prstDash val="solid"/>
                     </a:lnR>
                     <a:lnT w="9525" cap="flat" cmpd="sng" algn="ctr">
                       <a:solidFill>
-                        <a:srgbClr val="F7E8C9"/>
+                        <a:srgbClr val="F6EBD5"/>
                       </a:solidFill>
                       <a:prstDash val="solid"/>
                     </a:lnT>
                     <a:lnB w="9525" cap="flat" cmpd="sng" algn="ctr">
                       <a:solidFill>
-                        <a:srgbClr val="F7E8C9"/>
+                        <a:srgbClr val="F6EBD5"/>
                       </a:solidFill>
                       <a:prstDash val="solid"/>
                     </a:lnB>
                     <a:solidFill>
-                      <a:srgbClr val="F7E8C9"/>
+                      <a:srgbClr val="F6EBD5"/>
                     </a:solidFill>
                   </a:tcPr>
                 </a:tc>
@@ -3950,7 +4110,7 @@
                       <a:r>
                         <a:rPr sz="1500" b="0">
                           <a:solidFill>
-                            <a:srgbClr val="2B2B2B"/>
+                            <a:srgbClr val="26231F"/>
                           </a:solidFill>
                         </a:rPr>
                         <a:t>입력하세요</a:t>
@@ -3960,25 +4120,25 @@
                   <a:tcPr anchor="ctr" marL="73152" marR="73152">
                     <a:lnL w="9525" cap="flat" cmpd="sng" algn="ctr">
                       <a:solidFill>
-                        <a:srgbClr val="F7E8C9"/>
+                        <a:srgbClr val="F6EBD5"/>
                       </a:solidFill>
                       <a:prstDash val="solid"/>
                     </a:lnL>
                     <a:lnR w="9525" cap="flat" cmpd="sng" algn="ctr">
                       <a:solidFill>
-                        <a:srgbClr val="F7E8C9"/>
+                        <a:srgbClr val="F6EBD5"/>
                       </a:solidFill>
                       <a:prstDash val="solid"/>
                     </a:lnR>
                     <a:lnT w="9525" cap="flat" cmpd="sng" algn="ctr">
                       <a:solidFill>
-                        <a:srgbClr val="F7E8C9"/>
+                        <a:srgbClr val="F6EBD5"/>
                       </a:solidFill>
                       <a:prstDash val="solid"/>
                     </a:lnT>
                     <a:lnB w="9525" cap="flat" cmpd="sng" algn="ctr">
                       <a:solidFill>
-                        <a:srgbClr val="F7E8C9"/>
+                        <a:srgbClr val="F6EBD5"/>
                       </a:solidFill>
                       <a:prstDash val="solid"/>
                     </a:lnB>
@@ -3998,7 +4158,7 @@
                       <a:r>
                         <a:rPr sz="1500" b="1">
                           <a:solidFill>
-                            <a:srgbClr val="715214"/>
+                            <a:srgbClr val="493E27"/>
                           </a:solidFill>
                         </a:rPr>
                         <a:t>별명</a:t>
@@ -4008,30 +4168,30 @@
                   <a:tcPr anchor="ctr" marL="73152" marR="73152">
                     <a:lnL w="9525" cap="flat" cmpd="sng" algn="ctr">
                       <a:solidFill>
-                        <a:srgbClr val="F7E8C9"/>
+                        <a:srgbClr val="F6EBD5"/>
                       </a:solidFill>
                       <a:prstDash val="solid"/>
                     </a:lnL>
                     <a:lnR w="9525" cap="flat" cmpd="sng" algn="ctr">
                       <a:solidFill>
-                        <a:srgbClr val="F7E8C9"/>
+                        <a:srgbClr val="F6EBD5"/>
                       </a:solidFill>
                       <a:prstDash val="solid"/>
                     </a:lnR>
                     <a:lnT w="9525" cap="flat" cmpd="sng" algn="ctr">
                       <a:solidFill>
-                        <a:srgbClr val="F7E8C9"/>
+                        <a:srgbClr val="F6EBD5"/>
                       </a:solidFill>
                       <a:prstDash val="solid"/>
                     </a:lnT>
                     <a:lnB w="9525" cap="flat" cmpd="sng" algn="ctr">
                       <a:solidFill>
-                        <a:srgbClr val="F7E8C9"/>
+                        <a:srgbClr val="F6EBD5"/>
                       </a:solidFill>
                       <a:prstDash val="solid"/>
                     </a:lnB>
                     <a:solidFill>
-                      <a:srgbClr val="F7E8C9"/>
+                      <a:srgbClr val="F6EBD5"/>
                     </a:solidFill>
                   </a:tcPr>
                 </a:tc>
@@ -4044,7 +4204,7 @@
                       <a:r>
                         <a:rPr sz="1500" b="0">
                           <a:solidFill>
-                            <a:srgbClr val="2B2B2B"/>
+                            <a:srgbClr val="26231F"/>
                           </a:solidFill>
                         </a:rPr>
                         <a:t>입력하세요</a:t>
@@ -4054,30 +4214,30 @@
                   <a:tcPr anchor="ctr" marL="73152" marR="73152">
                     <a:lnL w="9525" cap="flat" cmpd="sng" algn="ctr">
                       <a:solidFill>
-                        <a:srgbClr val="F7E8C9"/>
+                        <a:srgbClr val="F6EBD5"/>
                       </a:solidFill>
                       <a:prstDash val="solid"/>
                     </a:lnL>
                     <a:lnR w="9525" cap="flat" cmpd="sng" algn="ctr">
                       <a:solidFill>
-                        <a:srgbClr val="F7E8C9"/>
+                        <a:srgbClr val="F6EBD5"/>
                       </a:solidFill>
                       <a:prstDash val="solid"/>
                     </a:lnR>
                     <a:lnT w="9525" cap="flat" cmpd="sng" algn="ctr">
                       <a:solidFill>
-                        <a:srgbClr val="F7E8C9"/>
+                        <a:srgbClr val="F6EBD5"/>
                       </a:solidFill>
                       <a:prstDash val="solid"/>
                     </a:lnT>
                     <a:lnB w="9525" cap="flat" cmpd="sng" algn="ctr">
                       <a:solidFill>
-                        <a:srgbClr val="F7E8C9"/>
+                        <a:srgbClr val="F6EBD5"/>
                       </a:solidFill>
                       <a:prstDash val="solid"/>
                     </a:lnB>
                     <a:solidFill>
-                      <a:srgbClr val="FCF7EE"/>
+                      <a:srgbClr val="FBF6EC"/>
                     </a:solidFill>
                   </a:tcPr>
                 </a:tc>
@@ -4092,7 +4252,7 @@
                       <a:r>
                         <a:rPr sz="1500" b="1">
                           <a:solidFill>
-                            <a:srgbClr val="715214"/>
+                            <a:srgbClr val="493E27"/>
                           </a:solidFill>
                         </a:rPr>
                         <a:t>부모의 마음</a:t>
@@ -4102,30 +4262,30 @@
                   <a:tcPr anchor="ctr" marL="73152" marR="73152">
                     <a:lnL w="9525" cap="flat" cmpd="sng" algn="ctr">
                       <a:solidFill>
-                        <a:srgbClr val="F7E8C9"/>
+                        <a:srgbClr val="F6EBD5"/>
                       </a:solidFill>
                       <a:prstDash val="solid"/>
                     </a:lnL>
                     <a:lnR w="9525" cap="flat" cmpd="sng" algn="ctr">
                       <a:solidFill>
-                        <a:srgbClr val="F7E8C9"/>
+                        <a:srgbClr val="F6EBD5"/>
                       </a:solidFill>
                       <a:prstDash val="solid"/>
                     </a:lnR>
                     <a:lnT w="9525" cap="flat" cmpd="sng" algn="ctr">
                       <a:solidFill>
-                        <a:srgbClr val="F7E8C9"/>
+                        <a:srgbClr val="F6EBD5"/>
                       </a:solidFill>
                       <a:prstDash val="solid"/>
                     </a:lnT>
                     <a:lnB w="9525" cap="flat" cmpd="sng" algn="ctr">
                       <a:solidFill>
-                        <a:srgbClr val="F7E8C9"/>
+                        <a:srgbClr val="F6EBD5"/>
                       </a:solidFill>
                       <a:prstDash val="solid"/>
                     </a:lnB>
                     <a:solidFill>
-                      <a:srgbClr val="F7E8C9"/>
+                      <a:srgbClr val="F6EBD5"/>
                     </a:solidFill>
                   </a:tcPr>
                 </a:tc>
@@ -4138,7 +4298,7 @@
                       <a:r>
                         <a:rPr sz="1500" b="0">
                           <a:solidFill>
-                            <a:srgbClr val="2B2B2B"/>
+                            <a:srgbClr val="26231F"/>
                           </a:solidFill>
                         </a:rPr>
                         <a:t>입력하세요</a:t>
@@ -4148,25 +4308,25 @@
                   <a:tcPr anchor="ctr" marL="73152" marR="73152">
                     <a:lnL w="9525" cap="flat" cmpd="sng" algn="ctr">
                       <a:solidFill>
-                        <a:srgbClr val="F7E8C9"/>
+                        <a:srgbClr val="F6EBD5"/>
                       </a:solidFill>
                       <a:prstDash val="solid"/>
                     </a:lnL>
                     <a:lnR w="9525" cap="flat" cmpd="sng" algn="ctr">
                       <a:solidFill>
-                        <a:srgbClr val="F7E8C9"/>
+                        <a:srgbClr val="F6EBD5"/>
                       </a:solidFill>
                       <a:prstDash val="solid"/>
                     </a:lnR>
                     <a:lnT w="9525" cap="flat" cmpd="sng" algn="ctr">
                       <a:solidFill>
-                        <a:srgbClr val="F7E8C9"/>
+                        <a:srgbClr val="F6EBD5"/>
                       </a:solidFill>
                       <a:prstDash val="solid"/>
                     </a:lnT>
                     <a:lnB w="9525" cap="flat" cmpd="sng" algn="ctr">
                       <a:solidFill>
-                        <a:srgbClr val="F7E8C9"/>
+                        <a:srgbClr val="F6EBD5"/>
                       </a:solidFill>
                       <a:prstDash val="solid"/>
                     </a:lnB>
@@ -4194,7 +4354,7 @@
     <p:bg>
       <p:bgPr>
         <a:solidFill>
-          <a:srgbClr val="F7E8C9"/>
+          <a:srgbClr val="FFFFFF"/>
         </a:solidFill>
         <a:effectLst/>
       </p:bgPr>
@@ -4214,20 +4374,84 @@
         </p:nvSpPr>
         <p:spPr>
           <a:xfrm>
-            <a:off x="274320" y="274320"/>
-            <a:ext cx="11643055" cy="6309360"/>
+            <a:off x="10180015" y="-1645920"/>
+            <a:ext cx="3474720" cy="3474720"/>
+          </a:xfrm>
+          <a:prstGeom prst="ellipse">
+            <a:avLst/>
+          </a:prstGeom>
+          <a:solidFill>
+            <a:srgbClr val="EBD6AD"/>
+          </a:solidFill>
+          <a:ln>
+            <a:noFill/>
+          </a:ln>
+        </p:spPr>
+        <p:txBody>
+          <a:bodyPr rtlCol="0" anchor="ctr"/>
+          <a:lstStyle/>
+          <a:p>
+            <a:pPr algn="ctr"/>
+          </a:p>
+        </p:txBody>
+      </p:sp>
+      <p:sp>
+        <p:nvSpPr>
+          <p:cNvPr id="4" name="상단 라벨"/>
+          <p:cNvSpPr txBox="1"/>
+          <p:nvPr/>
+        </p:nvSpPr>
+        <p:spPr>
+          <a:xfrm>
+            <a:off x="640080" y="274320"/>
+            <a:ext cx="5486400" cy="274320"/>
           </a:xfrm>
           <a:prstGeom prst="rect">
+            <a:avLst/>
+          </a:prstGeom>
+          <a:noFill/>
+        </p:spPr>
+        <p:txBody>
+          <a:bodyPr wrap="square" lIns="54864" rIns="54864" tIns="27432" bIns="27432" anchor="ctr">
+            <a:noAutofit/>
+          </a:bodyPr>
+          <a:lstStyle/>
+          <a:p>
+            <a:pPr algn="l">
+              <a:lnSpc>
+                <a:spcPct val="115000"/>
+              </a:lnSpc>
+            </a:pPr>
+            <a:r>
+              <a:rPr sz="900" b="1" i="0" spc="250">
+                <a:solidFill>
+                  <a:srgbClr val="26231F"/>
+                </a:solidFill>
+              </a:rPr>
+              <a:t>FIRST BIRTHDAY</a:t>
+            </a:r>
+          </a:p>
+        </p:txBody>
+      </p:sp>
+      <p:sp>
+        <p:nvSpPr>
+          <p:cNvPr id="5" name="포인트"/>
+          <p:cNvSpPr/>
+          <p:nvPr/>
+        </p:nvSpPr>
+        <p:spPr>
+          <a:xfrm>
+            <a:off x="11048695" y="502919"/>
+            <a:ext cx="274320" cy="274320"/>
+          </a:xfrm>
+          <a:prstGeom prst="ellipse">
             <a:avLst/>
           </a:prstGeom>
           <a:solidFill>
             <a:srgbClr val="FFFFFF"/>
           </a:solidFill>
-          <a:ln w="25400">
-            <a:solidFill>
-              <a:srgbClr val="C79123"/>
-            </a:solidFill>
-            <a:prstDash val="dash"/>
+          <a:ln>
+            <a:noFill/>
           </a:ln>
         </p:spPr>
         <p:txBody>
@@ -4250,8 +4474,8 @@
         </p:nvSpPr>
         <p:spPr>
           <a:xfrm>
-            <a:off x="777240" y="548640"/>
-            <a:ext cx="9357055" cy="822960"/>
+            <a:off x="640080" y="658368"/>
+            <a:ext cx="9082735" cy="868680"/>
           </a:xfrm>
         </p:spPr>
         <p:txBody>
@@ -4268,7 +4492,7 @@
             <a:r>
               <a:rPr sz="3000" b="1" i="0">
                 <a:solidFill>
-                  <a:srgbClr val="715214"/>
+                  <a:srgbClr val="26231F"/>
                 </a:solidFill>
               </a:rPr>
               <a:t>돌잡이 이야기</a:t>
@@ -4278,27 +4502,25 @@
       </p:sp>
       <p:sp>
         <p:nvSpPr>
-          <p:cNvPr id="4" name="카드 1"/>
+          <p:cNvPr id="6" name="카드 1"/>
           <p:cNvSpPr/>
           <p:nvPr/>
         </p:nvSpPr>
         <p:spPr>
           <a:xfrm>
-            <a:off x="777240" y="1554480"/>
-            <a:ext cx="2487853" cy="4663440"/>
+            <a:off x="640080" y="1783080"/>
+            <a:ext cx="2556433" cy="4572000"/>
           </a:xfrm>
           <a:prstGeom prst="roundRect">
             <a:avLst>
-              <a:gd name="adj" fmla="val 8000"/>
+              <a:gd name="adj" fmla="val 4000"/>
             </a:avLst>
           </a:prstGeom>
           <a:solidFill>
-            <a:srgbClr val="FCF7EE"/>
+            <a:srgbClr val="FBF6EC"/>
           </a:solidFill>
-          <a:ln w="15875">
-            <a:solidFill>
-              <a:srgbClr val="F7E8C9"/>
-            </a:solidFill>
+          <a:ln>
+            <a:noFill/>
           </a:ln>
         </p:spPr>
         <p:txBody>
@@ -4311,20 +4533,49 @@
       </p:sp>
       <p:sp>
         <p:nvSpPr>
-          <p:cNvPr id="5" name="번호 1"/>
+          <p:cNvPr id="7" name="포인트 막대"/>
           <p:cNvSpPr/>
           <p:nvPr/>
         </p:nvSpPr>
         <p:spPr>
           <a:xfrm>
-            <a:off x="960120" y="1737360"/>
+            <a:off x="640080" y="1892807"/>
+            <a:ext cx="54864" cy="4352544"/>
+          </a:xfrm>
+          <a:prstGeom prst="rect">
+            <a:avLst/>
+          </a:prstGeom>
+          <a:solidFill>
+            <a:srgbClr val="D8B879"/>
+          </a:solidFill>
+          <a:ln>
+            <a:noFill/>
+          </a:ln>
+        </p:spPr>
+        <p:txBody>
+          <a:bodyPr rtlCol="0" anchor="ctr"/>
+          <a:lstStyle/>
+          <a:p>
+            <a:pPr algn="ctr"/>
+          </a:p>
+        </p:txBody>
+      </p:sp>
+      <p:sp>
+        <p:nvSpPr>
+          <p:cNvPr id="8" name="번호 1"/>
+          <p:cNvSpPr/>
+          <p:nvPr/>
+        </p:nvSpPr>
+        <p:spPr>
+          <a:xfrm>
+            <a:off x="822959" y="1965960"/>
             <a:ext cx="457200" cy="457200"/>
           </a:xfrm>
           <a:prstGeom prst="ellipse">
             <a:avLst/>
           </a:prstGeom>
           <a:solidFill>
-            <a:srgbClr val="C79123"/>
+            <a:srgbClr val="D7E198"/>
           </a:solidFill>
           <a:ln>
             <a:noFill/>
@@ -4344,7 +4595,7 @@
             <a:r>
               <a:rPr sz="1600" b="1" i="0">
                 <a:solidFill>
-                  <a:srgbClr val="FFFFFF"/>
+                  <a:srgbClr val="26231F"/>
                 </a:solidFill>
               </a:rPr>
               <a:t>1</a:t>
@@ -4354,14 +4605,14 @@
       </p:sp>
       <p:sp>
         <p:nvSpPr>
-          <p:cNvPr id="6" name="TextBox 5"/>
+          <p:cNvPr id="9" name="TextBox 8"/>
           <p:cNvSpPr txBox="1"/>
           <p:nvPr/>
         </p:nvSpPr>
         <p:spPr>
           <a:xfrm>
-            <a:off x="914400" y="2331720"/>
-            <a:ext cx="2213533" cy="640080"/>
+            <a:off x="777240" y="2560320"/>
+            <a:ext cx="2282113" cy="640080"/>
           </a:xfrm>
           <a:prstGeom prst="rect">
             <a:avLst/>
@@ -4382,7 +4633,7 @@
             <a:r>
               <a:rPr sz="1600" b="1" i="0">
                 <a:solidFill>
-                  <a:srgbClr val="715214"/>
+                  <a:srgbClr val="493E27"/>
                 </a:solidFill>
               </a:rPr>
               <a:t>연필 · 공부</a:t>
@@ -4392,14 +4643,14 @@
       </p:sp>
       <p:sp>
         <p:nvSpPr>
-          <p:cNvPr id="7" name="TextBox 6"/>
+          <p:cNvPr id="10" name="TextBox 9"/>
           <p:cNvSpPr txBox="1"/>
           <p:nvPr/>
         </p:nvSpPr>
         <p:spPr>
           <a:xfrm>
-            <a:off x="914400" y="3017520"/>
-            <a:ext cx="2213533" cy="3063239"/>
+            <a:off x="777240" y="3246120"/>
+            <a:ext cx="2282113" cy="2971800"/>
           </a:xfrm>
           <a:prstGeom prst="rect">
             <a:avLst/>
@@ -4420,7 +4671,7 @@
             <a:r>
               <a:rPr sz="1400" b="0" i="0">
                 <a:solidFill>
-                  <a:srgbClr val="2B2B2B"/>
+                  <a:srgbClr val="26231F"/>
                 </a:solidFill>
               </a:rPr>
               <a:t>학문과 총명을 바라는 마음</a:t>
@@ -4430,27 +4681,25 @@
       </p:sp>
       <p:sp>
         <p:nvSpPr>
-          <p:cNvPr id="8" name="카드 2"/>
+          <p:cNvPr id="11" name="카드 2"/>
           <p:cNvSpPr/>
           <p:nvPr/>
         </p:nvSpPr>
         <p:spPr>
           <a:xfrm>
-            <a:off x="3493693" y="1554480"/>
-            <a:ext cx="2487853" cy="4663440"/>
+            <a:off x="3425113" y="1783080"/>
+            <a:ext cx="2556433" cy="4572000"/>
           </a:xfrm>
           <a:prstGeom prst="roundRect">
             <a:avLst>
-              <a:gd name="adj" fmla="val 8000"/>
+              <a:gd name="adj" fmla="val 4000"/>
             </a:avLst>
           </a:prstGeom>
           <a:solidFill>
-            <a:srgbClr val="FCF7EE"/>
+            <a:srgbClr val="FBF6EC"/>
           </a:solidFill>
-          <a:ln w="15875">
-            <a:solidFill>
-              <a:srgbClr val="F7E8C9"/>
-            </a:solidFill>
+          <a:ln>
+            <a:noFill/>
           </a:ln>
         </p:spPr>
         <p:txBody>
@@ -4463,20 +4712,49 @@
       </p:sp>
       <p:sp>
         <p:nvSpPr>
-          <p:cNvPr id="9" name="번호 2"/>
+          <p:cNvPr id="12" name="포인트 막대"/>
           <p:cNvSpPr/>
           <p:nvPr/>
         </p:nvSpPr>
         <p:spPr>
           <a:xfrm>
-            <a:off x="3676573" y="1737360"/>
+            <a:off x="3425113" y="1892807"/>
+            <a:ext cx="54864" cy="4352544"/>
+          </a:xfrm>
+          <a:prstGeom prst="rect">
+            <a:avLst/>
+          </a:prstGeom>
+          <a:solidFill>
+            <a:srgbClr val="D8B879"/>
+          </a:solidFill>
+          <a:ln>
+            <a:noFill/>
+          </a:ln>
+        </p:spPr>
+        <p:txBody>
+          <a:bodyPr rtlCol="0" anchor="ctr"/>
+          <a:lstStyle/>
+          <a:p>
+            <a:pPr algn="ctr"/>
+          </a:p>
+        </p:txBody>
+      </p:sp>
+      <p:sp>
+        <p:nvSpPr>
+          <p:cNvPr id="13" name="번호 2"/>
+          <p:cNvSpPr/>
+          <p:nvPr/>
+        </p:nvSpPr>
+        <p:spPr>
+          <a:xfrm>
+            <a:off x="3607993" y="1965960"/>
             <a:ext cx="457200" cy="457200"/>
           </a:xfrm>
           <a:prstGeom prst="ellipse">
             <a:avLst/>
           </a:prstGeom>
           <a:solidFill>
-            <a:srgbClr val="C79123"/>
+            <a:srgbClr val="D7E198"/>
           </a:solidFill>
           <a:ln>
             <a:noFill/>
@@ -4496,7 +4774,7 @@
             <a:r>
               <a:rPr sz="1600" b="1" i="0">
                 <a:solidFill>
-                  <a:srgbClr val="FFFFFF"/>
+                  <a:srgbClr val="26231F"/>
                 </a:solidFill>
               </a:rPr>
               <a:t>2</a:t>
@@ -4506,14 +4784,14 @@
       </p:sp>
       <p:sp>
         <p:nvSpPr>
-          <p:cNvPr id="10" name="TextBox 9"/>
+          <p:cNvPr id="14" name="TextBox 13"/>
           <p:cNvSpPr txBox="1"/>
           <p:nvPr/>
         </p:nvSpPr>
         <p:spPr>
           <a:xfrm>
-            <a:off x="3630853" y="2331720"/>
-            <a:ext cx="2213533" cy="640080"/>
+            <a:off x="3562273" y="2560320"/>
+            <a:ext cx="2282113" cy="640080"/>
           </a:xfrm>
           <a:prstGeom prst="rect">
             <a:avLst/>
@@ -4534,7 +4812,7 @@
             <a:r>
               <a:rPr sz="1600" b="1" i="0">
                 <a:solidFill>
-                  <a:srgbClr val="715214"/>
+                  <a:srgbClr val="493E27"/>
                 </a:solidFill>
               </a:rPr>
               <a:t>실 · 장수</a:t>
@@ -4544,14 +4822,14 @@
       </p:sp>
       <p:sp>
         <p:nvSpPr>
-          <p:cNvPr id="11" name="TextBox 10"/>
+          <p:cNvPr id="15" name="TextBox 14"/>
           <p:cNvSpPr txBox="1"/>
           <p:nvPr/>
         </p:nvSpPr>
         <p:spPr>
           <a:xfrm>
-            <a:off x="3630853" y="3017520"/>
-            <a:ext cx="2213533" cy="3063239"/>
+            <a:off x="3562273" y="3246120"/>
+            <a:ext cx="2282113" cy="2971800"/>
           </a:xfrm>
           <a:prstGeom prst="rect">
             <a:avLst/>
@@ -4572,7 +4850,7 @@
             <a:r>
               <a:rPr sz="1400" b="0" i="0">
                 <a:solidFill>
-                  <a:srgbClr val="2B2B2B"/>
+                  <a:srgbClr val="26231F"/>
                 </a:solidFill>
               </a:rPr>
               <a:t>건강하고 오래 살기를</a:t>
@@ -4582,27 +4860,25 @@
       </p:sp>
       <p:sp>
         <p:nvSpPr>
-          <p:cNvPr id="12" name="카드 3"/>
+          <p:cNvPr id="16" name="카드 3"/>
           <p:cNvSpPr/>
           <p:nvPr/>
         </p:nvSpPr>
         <p:spPr>
           <a:xfrm>
-            <a:off x="6210147" y="1554480"/>
-            <a:ext cx="2487853" cy="4663440"/>
+            <a:off x="6210147" y="1783080"/>
+            <a:ext cx="2556433" cy="4572000"/>
           </a:xfrm>
           <a:prstGeom prst="roundRect">
             <a:avLst>
-              <a:gd name="adj" fmla="val 8000"/>
+              <a:gd name="adj" fmla="val 4000"/>
             </a:avLst>
           </a:prstGeom>
           <a:solidFill>
-            <a:srgbClr val="FCF7EE"/>
+            <a:srgbClr val="FBF6EC"/>
           </a:solidFill>
-          <a:ln w="15875">
-            <a:solidFill>
-              <a:srgbClr val="F7E8C9"/>
-            </a:solidFill>
+          <a:ln>
+            <a:noFill/>
           </a:ln>
         </p:spPr>
         <p:txBody>
@@ -4615,20 +4891,49 @@
       </p:sp>
       <p:sp>
         <p:nvSpPr>
-          <p:cNvPr id="13" name="번호 3"/>
+          <p:cNvPr id="17" name="포인트 막대"/>
           <p:cNvSpPr/>
           <p:nvPr/>
         </p:nvSpPr>
         <p:spPr>
           <a:xfrm>
-            <a:off x="6393027" y="1737360"/>
+            <a:off x="6210147" y="1892807"/>
+            <a:ext cx="54864" cy="4352544"/>
+          </a:xfrm>
+          <a:prstGeom prst="rect">
+            <a:avLst/>
+          </a:prstGeom>
+          <a:solidFill>
+            <a:srgbClr val="D8B879"/>
+          </a:solidFill>
+          <a:ln>
+            <a:noFill/>
+          </a:ln>
+        </p:spPr>
+        <p:txBody>
+          <a:bodyPr rtlCol="0" anchor="ctr"/>
+          <a:lstStyle/>
+          <a:p>
+            <a:pPr algn="ctr"/>
+          </a:p>
+        </p:txBody>
+      </p:sp>
+      <p:sp>
+        <p:nvSpPr>
+          <p:cNvPr id="18" name="번호 3"/>
+          <p:cNvSpPr/>
+          <p:nvPr/>
+        </p:nvSpPr>
+        <p:spPr>
+          <a:xfrm>
+            <a:off x="6393027" y="1965960"/>
             <a:ext cx="457200" cy="457200"/>
           </a:xfrm>
           <a:prstGeom prst="ellipse">
             <a:avLst/>
           </a:prstGeom>
           <a:solidFill>
-            <a:srgbClr val="C79123"/>
+            <a:srgbClr val="D7E198"/>
           </a:solidFill>
           <a:ln>
             <a:noFill/>
@@ -4648,7 +4953,7 @@
             <a:r>
               <a:rPr sz="1600" b="1" i="0">
                 <a:solidFill>
-                  <a:srgbClr val="FFFFFF"/>
+                  <a:srgbClr val="26231F"/>
                 </a:solidFill>
               </a:rPr>
               <a:t>3</a:t>
@@ -4658,14 +4963,14 @@
       </p:sp>
       <p:sp>
         <p:nvSpPr>
-          <p:cNvPr id="14" name="TextBox 13"/>
+          <p:cNvPr id="19" name="TextBox 18"/>
           <p:cNvSpPr txBox="1"/>
           <p:nvPr/>
         </p:nvSpPr>
         <p:spPr>
           <a:xfrm>
-            <a:off x="6347307" y="2331720"/>
-            <a:ext cx="2213533" cy="640080"/>
+            <a:off x="6347307" y="2560320"/>
+            <a:ext cx="2282113" cy="640080"/>
           </a:xfrm>
           <a:prstGeom prst="rect">
             <a:avLst/>
@@ -4686,7 +4991,7 @@
             <a:r>
               <a:rPr sz="1600" b="1" i="0">
                 <a:solidFill>
-                  <a:srgbClr val="715214"/>
+                  <a:srgbClr val="493E27"/>
                 </a:solidFill>
               </a:rPr>
               <a:t>돈 · 부</a:t>
@@ -4696,14 +5001,14 @@
       </p:sp>
       <p:sp>
         <p:nvSpPr>
-          <p:cNvPr id="15" name="TextBox 14"/>
+          <p:cNvPr id="20" name="TextBox 19"/>
           <p:cNvSpPr txBox="1"/>
           <p:nvPr/>
         </p:nvSpPr>
         <p:spPr>
           <a:xfrm>
-            <a:off x="6347307" y="3017520"/>
-            <a:ext cx="2213533" cy="3063239"/>
+            <a:off x="6347307" y="3246120"/>
+            <a:ext cx="2282113" cy="2971800"/>
           </a:xfrm>
           <a:prstGeom prst="rect">
             <a:avLst/>
@@ -4724,7 +5029,7 @@
             <a:r>
               <a:rPr sz="1400" b="0" i="0">
                 <a:solidFill>
-                  <a:srgbClr val="2B2B2B"/>
+                  <a:srgbClr val="26231F"/>
                 </a:solidFill>
               </a:rPr>
               <a:t>넉넉한 삶을 바라는 마음</a:t>
@@ -4734,27 +5039,25 @@
       </p:sp>
       <p:sp>
         <p:nvSpPr>
-          <p:cNvPr id="16" name="카드 4"/>
+          <p:cNvPr id="21" name="카드 4"/>
           <p:cNvSpPr/>
           <p:nvPr/>
         </p:nvSpPr>
         <p:spPr>
           <a:xfrm>
-            <a:off x="8926601" y="1554480"/>
-            <a:ext cx="2487853" cy="4663440"/>
+            <a:off x="8995181" y="1783080"/>
+            <a:ext cx="2556433" cy="4572000"/>
           </a:xfrm>
           <a:prstGeom prst="roundRect">
             <a:avLst>
-              <a:gd name="adj" fmla="val 8000"/>
+              <a:gd name="adj" fmla="val 4000"/>
             </a:avLst>
           </a:prstGeom>
           <a:solidFill>
-            <a:srgbClr val="FCF7EE"/>
+            <a:srgbClr val="FBF6EC"/>
           </a:solidFill>
-          <a:ln w="15875">
-            <a:solidFill>
-              <a:srgbClr val="F7E8C9"/>
-            </a:solidFill>
+          <a:ln>
+            <a:noFill/>
           </a:ln>
         </p:spPr>
         <p:txBody>
@@ -4767,20 +5070,49 @@
       </p:sp>
       <p:sp>
         <p:nvSpPr>
-          <p:cNvPr id="17" name="번호 4"/>
+          <p:cNvPr id="22" name="포인트 막대"/>
           <p:cNvSpPr/>
           <p:nvPr/>
         </p:nvSpPr>
         <p:spPr>
           <a:xfrm>
-            <a:off x="9109481" y="1737360"/>
+            <a:off x="8995181" y="1892807"/>
+            <a:ext cx="54864" cy="4352544"/>
+          </a:xfrm>
+          <a:prstGeom prst="rect">
+            <a:avLst/>
+          </a:prstGeom>
+          <a:solidFill>
+            <a:srgbClr val="D8B879"/>
+          </a:solidFill>
+          <a:ln>
+            <a:noFill/>
+          </a:ln>
+        </p:spPr>
+        <p:txBody>
+          <a:bodyPr rtlCol="0" anchor="ctr"/>
+          <a:lstStyle/>
+          <a:p>
+            <a:pPr algn="ctr"/>
+          </a:p>
+        </p:txBody>
+      </p:sp>
+      <p:sp>
+        <p:nvSpPr>
+          <p:cNvPr id="23" name="번호 4"/>
+          <p:cNvSpPr/>
+          <p:nvPr/>
+        </p:nvSpPr>
+        <p:spPr>
+          <a:xfrm>
+            <a:off x="9178061" y="1965960"/>
             <a:ext cx="457200" cy="457200"/>
           </a:xfrm>
           <a:prstGeom prst="ellipse">
             <a:avLst/>
           </a:prstGeom>
           <a:solidFill>
-            <a:srgbClr val="C79123"/>
+            <a:srgbClr val="D7E198"/>
           </a:solidFill>
           <a:ln>
             <a:noFill/>
@@ -4800,7 +5132,7 @@
             <a:r>
               <a:rPr sz="1600" b="1" i="0">
                 <a:solidFill>
-                  <a:srgbClr val="FFFFFF"/>
+                  <a:srgbClr val="26231F"/>
                 </a:solidFill>
               </a:rPr>
               <a:t>4</a:t>
@@ -4810,14 +5142,14 @@
       </p:sp>
       <p:sp>
         <p:nvSpPr>
-          <p:cNvPr id="18" name="TextBox 17"/>
+          <p:cNvPr id="24" name="TextBox 23"/>
           <p:cNvSpPr txBox="1"/>
           <p:nvPr/>
         </p:nvSpPr>
         <p:spPr>
           <a:xfrm>
-            <a:off x="9063761" y="2331720"/>
-            <a:ext cx="2213533" cy="640080"/>
+            <a:off x="9132341" y="2560320"/>
+            <a:ext cx="2282113" cy="640080"/>
           </a:xfrm>
           <a:prstGeom prst="rect">
             <a:avLst/>
@@ -4838,7 +5170,7 @@
             <a:r>
               <a:rPr sz="1600" b="1" i="0">
                 <a:solidFill>
-                  <a:srgbClr val="715214"/>
+                  <a:srgbClr val="493E27"/>
                 </a:solidFill>
               </a:rPr>
               <a:t>마이크 · 인기</a:t>
@@ -4848,14 +5180,14 @@
       </p:sp>
       <p:sp>
         <p:nvSpPr>
-          <p:cNvPr id="19" name="TextBox 18"/>
+          <p:cNvPr id="25" name="TextBox 24"/>
           <p:cNvSpPr txBox="1"/>
           <p:nvPr/>
         </p:nvSpPr>
         <p:spPr>
           <a:xfrm>
-            <a:off x="9063761" y="3017520"/>
-            <a:ext cx="2213533" cy="3063239"/>
+            <a:off x="9132341" y="3246120"/>
+            <a:ext cx="2282113" cy="2971800"/>
           </a:xfrm>
           <a:prstGeom prst="rect">
             <a:avLst/>
@@ -4876,7 +5208,7 @@
             <a:r>
               <a:rPr sz="1400" b="0" i="0">
                 <a:solidFill>
-                  <a:srgbClr val="2B2B2B"/>
+                  <a:srgbClr val="26231F"/>
                 </a:solidFill>
               </a:rPr>
               <a:t>사람들에게 사랑받기를</a:t>
@@ -4898,7 +5230,7 @@
     <p:bg>
       <p:bgPr>
         <a:solidFill>
-          <a:srgbClr val="F7E8C9"/>
+          <a:srgbClr val="FFFFFF"/>
         </a:solidFill>
         <a:effectLst/>
       </p:bgPr>
@@ -4918,20 +5250,84 @@
         </p:nvSpPr>
         <p:spPr>
           <a:xfrm>
-            <a:off x="274320" y="274320"/>
-            <a:ext cx="11643055" cy="6309360"/>
+            <a:off x="10180015" y="-1645920"/>
+            <a:ext cx="3474720" cy="3474720"/>
+          </a:xfrm>
+          <a:prstGeom prst="ellipse">
+            <a:avLst/>
+          </a:prstGeom>
+          <a:solidFill>
+            <a:srgbClr val="EBD6AD"/>
+          </a:solidFill>
+          <a:ln>
+            <a:noFill/>
+          </a:ln>
+        </p:spPr>
+        <p:txBody>
+          <a:bodyPr rtlCol="0" anchor="ctr"/>
+          <a:lstStyle/>
+          <a:p>
+            <a:pPr algn="ctr"/>
+          </a:p>
+        </p:txBody>
+      </p:sp>
+      <p:sp>
+        <p:nvSpPr>
+          <p:cNvPr id="4" name="상단 라벨"/>
+          <p:cNvSpPr txBox="1"/>
+          <p:nvPr/>
+        </p:nvSpPr>
+        <p:spPr>
+          <a:xfrm>
+            <a:off x="640080" y="274320"/>
+            <a:ext cx="5486400" cy="274320"/>
           </a:xfrm>
           <a:prstGeom prst="rect">
+            <a:avLst/>
+          </a:prstGeom>
+          <a:noFill/>
+        </p:spPr>
+        <p:txBody>
+          <a:bodyPr wrap="square" lIns="54864" rIns="54864" tIns="27432" bIns="27432" anchor="ctr">
+            <a:noAutofit/>
+          </a:bodyPr>
+          <a:lstStyle/>
+          <a:p>
+            <a:pPr algn="l">
+              <a:lnSpc>
+                <a:spcPct val="115000"/>
+              </a:lnSpc>
+            </a:pPr>
+            <a:r>
+              <a:rPr sz="900" b="1" i="0" spc="250">
+                <a:solidFill>
+                  <a:srgbClr val="26231F"/>
+                </a:solidFill>
+              </a:rPr>
+              <a:t>FIRST BIRTHDAY</a:t>
+            </a:r>
+          </a:p>
+        </p:txBody>
+      </p:sp>
+      <p:sp>
+        <p:nvSpPr>
+          <p:cNvPr id="5" name="포인트"/>
+          <p:cNvSpPr/>
+          <p:nvPr/>
+        </p:nvSpPr>
+        <p:spPr>
+          <a:xfrm>
+            <a:off x="11048695" y="502919"/>
+            <a:ext cx="274320" cy="274320"/>
+          </a:xfrm>
+          <a:prstGeom prst="ellipse">
             <a:avLst/>
           </a:prstGeom>
           <a:solidFill>
             <a:srgbClr val="FFFFFF"/>
           </a:solidFill>
-          <a:ln w="25400">
-            <a:solidFill>
-              <a:srgbClr val="C79123"/>
-            </a:solidFill>
-            <a:prstDash val="dash"/>
+          <a:ln>
+            <a:noFill/>
           </a:ln>
         </p:spPr>
         <p:txBody>
@@ -4954,8 +5350,8 @@
         </p:nvSpPr>
         <p:spPr>
           <a:xfrm>
-            <a:off x="777240" y="548640"/>
-            <a:ext cx="9357055" cy="822960"/>
+            <a:off x="640080" y="658368"/>
+            <a:ext cx="9082735" cy="868680"/>
           </a:xfrm>
         </p:spPr>
         <p:txBody>
@@ -4972,7 +5368,7 @@
             <a:r>
               <a:rPr sz="3000" b="1" i="0">
                 <a:solidFill>
-                  <a:srgbClr val="715214"/>
+                  <a:srgbClr val="26231F"/>
                 </a:solidFill>
               </a:rPr>
               <a:t>우리 아기의 선택은?</a:t>
@@ -4982,14 +5378,14 @@
       </p:sp>
       <p:sp>
         <p:nvSpPr>
-          <p:cNvPr id="4" name="사진 자리"/>
+          <p:cNvPr id="6" name="사진 자리"/>
           <p:cNvSpPr/>
           <p:nvPr/>
         </p:nvSpPr>
         <p:spPr>
           <a:xfrm>
-            <a:off x="777240" y="1554480"/>
-            <a:ext cx="4572000" cy="4663440"/>
+            <a:off x="640080" y="1783080"/>
+            <a:ext cx="4572000" cy="4572000"/>
           </a:xfrm>
           <a:prstGeom prst="roundRect">
             <a:avLst>
@@ -4997,12 +5393,10 @@
             </a:avLst>
           </a:prstGeom>
           <a:solidFill>
-            <a:srgbClr val="F7E8C9"/>
+            <a:srgbClr val="F6EBD5"/>
           </a:solidFill>
           <a:ln w="19050">
-            <a:solidFill>
-              <a:srgbClr val="C79123"/>
-            </a:solidFill>
+            <a:noFill/>
             <a:prstDash val="dash"/>
           </a:ln>
         </p:spPr>
@@ -5020,7 +5414,7 @@
             <a:r>
               <a:rPr sz="1400" b="0" i="0">
                 <a:solidFill>
-                  <a:srgbClr val="715214"/>
+                  <a:srgbClr val="8E8780"/>
                 </a:solidFill>
               </a:rPr>
               <a:t>돌잡이 사진</a:t>
@@ -5030,27 +5424,25 @@
       </p:sp>
       <p:sp>
         <p:nvSpPr>
-          <p:cNvPr id="5" name="선택 칸"/>
+          <p:cNvPr id="7" name="선택 칸"/>
           <p:cNvSpPr/>
           <p:nvPr/>
         </p:nvSpPr>
         <p:spPr>
           <a:xfrm>
-            <a:off x="5715000" y="1554480"/>
-            <a:ext cx="5699455" cy="4663440"/>
+            <a:off x="5577840" y="1783080"/>
+            <a:ext cx="5973775" cy="4572000"/>
           </a:xfrm>
           <a:prstGeom prst="roundRect">
             <a:avLst>
-              <a:gd name="adj" fmla="val 8000"/>
+              <a:gd name="adj" fmla="val 4000"/>
             </a:avLst>
           </a:prstGeom>
           <a:solidFill>
-            <a:srgbClr val="FCF7EE"/>
+            <a:srgbClr val="FBF6EC"/>
           </a:solidFill>
-          <a:ln w="12700">
-            <a:solidFill>
-              <a:srgbClr val="F7E8C9"/>
-            </a:solidFill>
+          <a:ln>
+            <a:noFill/>
           </a:ln>
         </p:spPr>
         <p:txBody>
@@ -5063,14 +5455,43 @@
       </p:sp>
       <p:sp>
         <p:nvSpPr>
-          <p:cNvPr id="6" name="TextBox 5"/>
+          <p:cNvPr id="8" name="포인트 막대"/>
+          <p:cNvSpPr/>
+          <p:nvPr/>
+        </p:nvSpPr>
+        <p:spPr>
+          <a:xfrm>
+            <a:off x="5577840" y="1892807"/>
+            <a:ext cx="54864" cy="4352544"/>
+          </a:xfrm>
+          <a:prstGeom prst="rect">
+            <a:avLst/>
+          </a:prstGeom>
+          <a:solidFill>
+            <a:srgbClr val="D8B879"/>
+          </a:solidFill>
+          <a:ln>
+            <a:noFill/>
+          </a:ln>
+        </p:spPr>
+        <p:txBody>
+          <a:bodyPr rtlCol="0" anchor="ctr"/>
+          <a:lstStyle/>
+          <a:p>
+            <a:pPr algn="ctr"/>
+          </a:p>
+        </p:txBody>
+      </p:sp>
+      <p:sp>
+        <p:nvSpPr>
+          <p:cNvPr id="9" name="TextBox 8"/>
           <p:cNvSpPr txBox="1"/>
           <p:nvPr/>
         </p:nvSpPr>
         <p:spPr>
           <a:xfrm>
-            <a:off x="5989320" y="1828800"/>
-            <a:ext cx="5150815" cy="4114800"/>
+            <a:off x="5852160" y="2057400"/>
+            <a:ext cx="5425135" cy="4023360"/>
           </a:xfrm>
           <a:prstGeom prst="rect">
             <a:avLst/>
@@ -5091,7 +5512,7 @@
             <a:r>
               <a:rPr sz="1800" b="0" i="0">
                 <a:solidFill>
-                  <a:srgbClr val="2B2B2B"/>
+                  <a:srgbClr val="26231F"/>
                 </a:solidFill>
               </a:rPr>
               <a:t>우리 아기의 선택</a:t>
@@ -5106,7 +5527,7 @@
             <a:r>
               <a:rPr sz="1800" b="0" i="0">
                 <a:solidFill>
-                  <a:srgbClr val="2B2B2B"/>
+                  <a:srgbClr val="26231F"/>
                 </a:solidFill>
               </a:rPr>
               <a:t/>
@@ -5121,7 +5542,7 @@
             <a:r>
               <a:rPr sz="1800" b="0" i="0">
                 <a:solidFill>
-                  <a:srgbClr val="2B2B2B"/>
+                  <a:srgbClr val="26231F"/>
                 </a:solidFill>
               </a:rPr>
               <a:t>무엇을 집었나요?</a:t>
@@ -5136,7 +5557,7 @@
             <a:r>
               <a:rPr sz="1800" b="0" i="0">
                 <a:solidFill>
-                  <a:srgbClr val="2B2B2B"/>
+                  <a:srgbClr val="26231F"/>
                 </a:solidFill>
               </a:rPr>
               <a:t/>
@@ -5151,7 +5572,7 @@
             <a:r>
               <a:rPr sz="1800" b="0" i="0">
                 <a:solidFill>
-                  <a:srgbClr val="2B2B2B"/>
+                  <a:srgbClr val="26231F"/>
                 </a:solidFill>
               </a:rPr>
               <a:t>그때 가족의 반응은?</a:t>
@@ -5173,7 +5594,7 @@
     <p:bg>
       <p:bgPr>
         <a:solidFill>
-          <a:srgbClr val="F7E8C9"/>
+          <a:srgbClr val="FFFFFF"/>
         </a:solidFill>
         <a:effectLst/>
       </p:bgPr>
@@ -5193,20 +5614,84 @@
         </p:nvSpPr>
         <p:spPr>
           <a:xfrm>
-            <a:off x="274320" y="274320"/>
-            <a:ext cx="11643055" cy="6309360"/>
+            <a:off x="10180015" y="-1645920"/>
+            <a:ext cx="3474720" cy="3474720"/>
+          </a:xfrm>
+          <a:prstGeom prst="ellipse">
+            <a:avLst/>
+          </a:prstGeom>
+          <a:solidFill>
+            <a:srgbClr val="EBD6AD"/>
+          </a:solidFill>
+          <a:ln>
+            <a:noFill/>
+          </a:ln>
+        </p:spPr>
+        <p:txBody>
+          <a:bodyPr rtlCol="0" anchor="ctr"/>
+          <a:lstStyle/>
+          <a:p>
+            <a:pPr algn="ctr"/>
+          </a:p>
+        </p:txBody>
+      </p:sp>
+      <p:sp>
+        <p:nvSpPr>
+          <p:cNvPr id="4" name="상단 라벨"/>
+          <p:cNvSpPr txBox="1"/>
+          <p:nvPr/>
+        </p:nvSpPr>
+        <p:spPr>
+          <a:xfrm>
+            <a:off x="640080" y="274320"/>
+            <a:ext cx="5486400" cy="274320"/>
           </a:xfrm>
           <a:prstGeom prst="rect">
+            <a:avLst/>
+          </a:prstGeom>
+          <a:noFill/>
+        </p:spPr>
+        <p:txBody>
+          <a:bodyPr wrap="square" lIns="54864" rIns="54864" tIns="27432" bIns="27432" anchor="ctr">
+            <a:noAutofit/>
+          </a:bodyPr>
+          <a:lstStyle/>
+          <a:p>
+            <a:pPr algn="l">
+              <a:lnSpc>
+                <a:spcPct val="115000"/>
+              </a:lnSpc>
+            </a:pPr>
+            <a:r>
+              <a:rPr sz="900" b="1" i="0" spc="250">
+                <a:solidFill>
+                  <a:srgbClr val="26231F"/>
+                </a:solidFill>
+              </a:rPr>
+              <a:t>FIRST BIRTHDAY</a:t>
+            </a:r>
+          </a:p>
+        </p:txBody>
+      </p:sp>
+      <p:sp>
+        <p:nvSpPr>
+          <p:cNvPr id="5" name="포인트"/>
+          <p:cNvSpPr/>
+          <p:nvPr/>
+        </p:nvSpPr>
+        <p:spPr>
+          <a:xfrm>
+            <a:off x="11048695" y="502919"/>
+            <a:ext cx="274320" cy="274320"/>
+          </a:xfrm>
+          <a:prstGeom prst="ellipse">
             <a:avLst/>
           </a:prstGeom>
           <a:solidFill>
             <a:srgbClr val="FFFFFF"/>
           </a:solidFill>
-          <a:ln w="25400">
-            <a:solidFill>
-              <a:srgbClr val="C79123"/>
-            </a:solidFill>
-            <a:prstDash val="dash"/>
+          <a:ln>
+            <a:noFill/>
           </a:ln>
         </p:spPr>
         <p:txBody>
@@ -5229,8 +5714,8 @@
         </p:nvSpPr>
         <p:spPr>
           <a:xfrm>
-            <a:off x="777240" y="548640"/>
-            <a:ext cx="9357055" cy="822960"/>
+            <a:off x="640080" y="658368"/>
+            <a:ext cx="9082735" cy="868680"/>
           </a:xfrm>
         </p:spPr>
         <p:txBody>
@@ -5247,7 +5732,7 @@
             <a:r>
               <a:rPr sz="3000" b="1" i="0">
                 <a:solidFill>
-                  <a:srgbClr val="715214"/>
+                  <a:srgbClr val="26231F"/>
                 </a:solidFill>
               </a:rPr>
               <a:t>사진 모음</a:t>
@@ -5257,14 +5742,14 @@
       </p:sp>
       <p:sp>
         <p:nvSpPr>
-          <p:cNvPr id="4" name="사진 자리"/>
+          <p:cNvPr id="6" name="사진 자리"/>
           <p:cNvSpPr/>
           <p:nvPr/>
         </p:nvSpPr>
         <p:spPr>
           <a:xfrm>
-            <a:off x="777240" y="1554480"/>
-            <a:ext cx="2522143" cy="2240279"/>
+            <a:off x="640080" y="1783080"/>
+            <a:ext cx="2590723" cy="2194560"/>
           </a:xfrm>
           <a:prstGeom prst="roundRect">
             <a:avLst>
@@ -5272,12 +5757,10 @@
             </a:avLst>
           </a:prstGeom>
           <a:solidFill>
-            <a:srgbClr val="F7E8C9"/>
+            <a:srgbClr val="F6EBD5"/>
           </a:solidFill>
           <a:ln w="19050">
-            <a:solidFill>
-              <a:srgbClr val="C79123"/>
-            </a:solidFill>
+            <a:noFill/>
             <a:prstDash val="dash"/>
           </a:ln>
         </p:spPr>
@@ -5295,7 +5778,7 @@
             <a:r>
               <a:rPr sz="1200" b="0" i="0">
                 <a:solidFill>
-                  <a:srgbClr val="715214"/>
+                  <a:srgbClr val="8E8780"/>
                 </a:solidFill>
               </a:rPr>
               <a:t>사진 1</a:t>
@@ -5305,14 +5788,14 @@
       </p:sp>
       <p:sp>
         <p:nvSpPr>
-          <p:cNvPr id="5" name="사진 자리"/>
+          <p:cNvPr id="7" name="사진 자리"/>
           <p:cNvSpPr/>
           <p:nvPr/>
         </p:nvSpPr>
         <p:spPr>
           <a:xfrm>
-            <a:off x="3482263" y="1554480"/>
-            <a:ext cx="2522143" cy="2240279"/>
+            <a:off x="3413683" y="1783080"/>
+            <a:ext cx="2590723" cy="2194560"/>
           </a:xfrm>
           <a:prstGeom prst="roundRect">
             <a:avLst>
@@ -5320,12 +5803,10 @@
             </a:avLst>
           </a:prstGeom>
           <a:solidFill>
-            <a:srgbClr val="F7E8C9"/>
+            <a:srgbClr val="F6EBD5"/>
           </a:solidFill>
           <a:ln w="19050">
-            <a:solidFill>
-              <a:srgbClr val="C79123"/>
-            </a:solidFill>
+            <a:noFill/>
             <a:prstDash val="dash"/>
           </a:ln>
         </p:spPr>
@@ -5343,7 +5824,7 @@
             <a:r>
               <a:rPr sz="1200" b="0" i="0">
                 <a:solidFill>
-                  <a:srgbClr val="715214"/>
+                  <a:srgbClr val="8E8780"/>
                 </a:solidFill>
               </a:rPr>
               <a:t>사진 2</a:t>
@@ -5353,14 +5834,14 @@
       </p:sp>
       <p:sp>
         <p:nvSpPr>
-          <p:cNvPr id="6" name="사진 자리"/>
+          <p:cNvPr id="8" name="사진 자리"/>
           <p:cNvSpPr/>
           <p:nvPr/>
         </p:nvSpPr>
         <p:spPr>
           <a:xfrm>
-            <a:off x="6187287" y="1554480"/>
-            <a:ext cx="2522143" cy="2240279"/>
+            <a:off x="6187287" y="1783080"/>
+            <a:ext cx="2590723" cy="2194560"/>
           </a:xfrm>
           <a:prstGeom prst="roundRect">
             <a:avLst>
@@ -5368,12 +5849,10 @@
             </a:avLst>
           </a:prstGeom>
           <a:solidFill>
-            <a:srgbClr val="F7E8C9"/>
+            <a:srgbClr val="F6EBD5"/>
           </a:solidFill>
           <a:ln w="19050">
-            <a:solidFill>
-              <a:srgbClr val="C79123"/>
-            </a:solidFill>
+            <a:noFill/>
             <a:prstDash val="dash"/>
           </a:ln>
         </p:spPr>
@@ -5391,7 +5870,7 @@
             <a:r>
               <a:rPr sz="1200" b="0" i="0">
                 <a:solidFill>
-                  <a:srgbClr val="715214"/>
+                  <a:srgbClr val="8E8780"/>
                 </a:solidFill>
               </a:rPr>
               <a:t>사진 3</a:t>
@@ -5401,14 +5880,14 @@
       </p:sp>
       <p:sp>
         <p:nvSpPr>
-          <p:cNvPr id="7" name="사진 자리"/>
+          <p:cNvPr id="9" name="사진 자리"/>
           <p:cNvSpPr/>
           <p:nvPr/>
         </p:nvSpPr>
         <p:spPr>
           <a:xfrm>
-            <a:off x="8892311" y="1554480"/>
-            <a:ext cx="2522143" cy="2240279"/>
+            <a:off x="8960891" y="1783080"/>
+            <a:ext cx="2590723" cy="2194560"/>
           </a:xfrm>
           <a:prstGeom prst="roundRect">
             <a:avLst>
@@ -5416,12 +5895,10 @@
             </a:avLst>
           </a:prstGeom>
           <a:solidFill>
-            <a:srgbClr val="F7E8C9"/>
+            <a:srgbClr val="F6EBD5"/>
           </a:solidFill>
           <a:ln w="19050">
-            <a:solidFill>
-              <a:srgbClr val="C79123"/>
-            </a:solidFill>
+            <a:noFill/>
             <a:prstDash val="dash"/>
           </a:ln>
         </p:spPr>
@@ -5439,7 +5916,7 @@
             <a:r>
               <a:rPr sz="1200" b="0" i="0">
                 <a:solidFill>
-                  <a:srgbClr val="715214"/>
+                  <a:srgbClr val="8E8780"/>
                 </a:solidFill>
               </a:rPr>
               <a:t>사진 4</a:t>
@@ -5449,14 +5926,14 @@
       </p:sp>
       <p:sp>
         <p:nvSpPr>
-          <p:cNvPr id="8" name="사진 자리"/>
+          <p:cNvPr id="10" name="사진 자리"/>
           <p:cNvSpPr/>
           <p:nvPr/>
         </p:nvSpPr>
         <p:spPr>
           <a:xfrm>
-            <a:off x="777240" y="3977639"/>
-            <a:ext cx="2522143" cy="2240279"/>
+            <a:off x="640080" y="4160520"/>
+            <a:ext cx="2590723" cy="2194560"/>
           </a:xfrm>
           <a:prstGeom prst="roundRect">
             <a:avLst>
@@ -5464,12 +5941,10 @@
             </a:avLst>
           </a:prstGeom>
           <a:solidFill>
-            <a:srgbClr val="F7E8C9"/>
+            <a:srgbClr val="F6EBD5"/>
           </a:solidFill>
           <a:ln w="19050">
-            <a:solidFill>
-              <a:srgbClr val="C79123"/>
-            </a:solidFill>
+            <a:noFill/>
             <a:prstDash val="dash"/>
           </a:ln>
         </p:spPr>
@@ -5487,7 +5962,7 @@
             <a:r>
               <a:rPr sz="1200" b="0" i="0">
                 <a:solidFill>
-                  <a:srgbClr val="715214"/>
+                  <a:srgbClr val="8E8780"/>
                 </a:solidFill>
               </a:rPr>
               <a:t>사진 5</a:t>
@@ -5497,14 +5972,14 @@
       </p:sp>
       <p:sp>
         <p:nvSpPr>
-          <p:cNvPr id="9" name="사진 자리"/>
+          <p:cNvPr id="11" name="사진 자리"/>
           <p:cNvSpPr/>
           <p:nvPr/>
         </p:nvSpPr>
         <p:spPr>
           <a:xfrm>
-            <a:off x="3482263" y="3977639"/>
-            <a:ext cx="2522143" cy="2240279"/>
+            <a:off x="3413683" y="4160520"/>
+            <a:ext cx="2590723" cy="2194560"/>
           </a:xfrm>
           <a:prstGeom prst="roundRect">
             <a:avLst>
@@ -5512,12 +5987,10 @@
             </a:avLst>
           </a:prstGeom>
           <a:solidFill>
-            <a:srgbClr val="F7E8C9"/>
+            <a:srgbClr val="F6EBD5"/>
           </a:solidFill>
           <a:ln w="19050">
-            <a:solidFill>
-              <a:srgbClr val="C79123"/>
-            </a:solidFill>
+            <a:noFill/>
             <a:prstDash val="dash"/>
           </a:ln>
         </p:spPr>
@@ -5535,7 +6008,7 @@
             <a:r>
               <a:rPr sz="1200" b="0" i="0">
                 <a:solidFill>
-                  <a:srgbClr val="715214"/>
+                  <a:srgbClr val="8E8780"/>
                 </a:solidFill>
               </a:rPr>
               <a:t>사진 6</a:t>
@@ -5545,14 +6018,14 @@
       </p:sp>
       <p:sp>
         <p:nvSpPr>
-          <p:cNvPr id="10" name="사진 자리"/>
+          <p:cNvPr id="12" name="사진 자리"/>
           <p:cNvSpPr/>
           <p:nvPr/>
         </p:nvSpPr>
         <p:spPr>
           <a:xfrm>
-            <a:off x="6187287" y="3977639"/>
-            <a:ext cx="2522143" cy="2240279"/>
+            <a:off x="6187287" y="4160520"/>
+            <a:ext cx="2590723" cy="2194560"/>
           </a:xfrm>
           <a:prstGeom prst="roundRect">
             <a:avLst>
@@ -5560,12 +6033,10 @@
             </a:avLst>
           </a:prstGeom>
           <a:solidFill>
-            <a:srgbClr val="F7E8C9"/>
+            <a:srgbClr val="F6EBD5"/>
           </a:solidFill>
           <a:ln w="19050">
-            <a:solidFill>
-              <a:srgbClr val="C79123"/>
-            </a:solidFill>
+            <a:noFill/>
             <a:prstDash val="dash"/>
           </a:ln>
         </p:spPr>
@@ -5583,7 +6054,7 @@
             <a:r>
               <a:rPr sz="1200" b="0" i="0">
                 <a:solidFill>
-                  <a:srgbClr val="715214"/>
+                  <a:srgbClr val="8E8780"/>
                 </a:solidFill>
               </a:rPr>
               <a:t>사진 7</a:t>
@@ -5593,14 +6064,14 @@
       </p:sp>
       <p:sp>
         <p:nvSpPr>
-          <p:cNvPr id="11" name="사진 자리"/>
+          <p:cNvPr id="13" name="사진 자리"/>
           <p:cNvSpPr/>
           <p:nvPr/>
         </p:nvSpPr>
         <p:spPr>
           <a:xfrm>
-            <a:off x="8892311" y="3977639"/>
-            <a:ext cx="2522143" cy="2240279"/>
+            <a:off x="8960891" y="4160520"/>
+            <a:ext cx="2590723" cy="2194560"/>
           </a:xfrm>
           <a:prstGeom prst="roundRect">
             <a:avLst>
@@ -5608,12 +6079,10 @@
             </a:avLst>
           </a:prstGeom>
           <a:solidFill>
-            <a:srgbClr val="F7E8C9"/>
+            <a:srgbClr val="F6EBD5"/>
           </a:solidFill>
           <a:ln w="19050">
-            <a:solidFill>
-              <a:srgbClr val="C79123"/>
-            </a:solidFill>
+            <a:noFill/>
             <a:prstDash val="dash"/>
           </a:ln>
         </p:spPr>
@@ -5631,7 +6100,7 @@
             <a:r>
               <a:rPr sz="1200" b="0" i="0">
                 <a:solidFill>
-                  <a:srgbClr val="715214"/>
+                  <a:srgbClr val="8E8780"/>
                 </a:solidFill>
               </a:rPr>
               <a:t>사진 8</a:t>
@@ -5650,6 +6119,14 @@
 <file path=ppt/slides/slide6.xml><?xml version="1.0" encoding="utf-8"?>
 <p:sld xmlns:a="http://schemas.openxmlformats.org/drawingml/2006/main" xmlns:p="http://schemas.openxmlformats.org/presentationml/2006/main" xmlns:r="http://schemas.openxmlformats.org/officeDocument/2006/relationships">
   <p:cSld>
+    <p:bg>
+      <p:bgPr>
+        <a:solidFill>
+          <a:srgbClr val="FBF6EC"/>
+        </a:solidFill>
+        <a:effectLst/>
+      </p:bgPr>
+    </p:bg>
     <p:spTree>
       <p:nvGrpSpPr>
         <p:cNvPr id="1" name=""/>
@@ -5657,30 +6134,120 @@
         <p:nvPr/>
       </p:nvGrpSpPr>
       <p:grpSpPr/>
-      <p:pic>
-        <p:nvPicPr>
-          <p:cNvPr id="3" name="표지 그림" descr="birthday-27.jpg"/>
-          <p:cNvPicPr>
-            <a:picLocks noChangeAspect="1"/>
-          </p:cNvPicPr>
+      <p:sp>
+        <p:nvSpPr>
+          <p:cNvPr id="3" name="사진 자리"/>
+          <p:cNvSpPr/>
           <p:nvPr/>
-        </p:nvPicPr>
-        <p:blipFill>
-          <a:blip r:embed="rId2"/>
-          <a:stretch>
-            <a:fillRect/>
-          </a:stretch>
-        </p:blipFill>
-        <p:spPr>
-          <a:xfrm>
-            <a:off x="0" y="0"/>
-            <a:ext cx="12191695" cy="6858000"/>
+        </p:nvSpPr>
+        <p:spPr>
+          <a:xfrm>
+            <a:off x="1463003" y="960120"/>
+            <a:ext cx="3657508" cy="4526280"/>
+          </a:xfrm>
+          <a:prstGeom prst="roundRect">
+            <a:avLst>
+              <a:gd name="adj" fmla="val 4000"/>
+            </a:avLst>
+          </a:prstGeom>
+          <a:solidFill>
+            <a:srgbClr val="EBD6AD"/>
+          </a:solidFill>
+          <a:ln>
+            <a:noFill/>
+          </a:ln>
+        </p:spPr>
+        <p:txBody>
+          <a:bodyPr rtlCol="0" anchor="ctr" wrap="square" lIns="54864" rIns="54864" tIns="27432" bIns="27432">
+            <a:noAutofit/>
+          </a:bodyPr>
+          <a:lstStyle/>
+          <a:p>
+            <a:pPr algn="ctr">
+              <a:lnSpc>
+                <a:spcPct val="100000"/>
+              </a:lnSpc>
+            </a:pPr>
+            <a:r>
+              <a:rPr sz="1400" b="0" i="0">
+                <a:solidFill>
+                  <a:srgbClr val="493E27"/>
+                </a:solidFill>
+              </a:rPr>
+              <a:t>사진을 넣어 주세요</a:t>
+            </a:r>
+          </a:p>
+        </p:txBody>
+      </p:sp>
+      <p:sp>
+        <p:nvSpPr>
+          <p:cNvPr id="4" name="장식"/>
+          <p:cNvSpPr/>
+          <p:nvPr/>
+        </p:nvSpPr>
+        <p:spPr>
+          <a:xfrm>
+            <a:off x="975335" y="1234439"/>
+            <a:ext cx="3657508" cy="4526280"/>
+          </a:xfrm>
+          <a:prstGeom prst="roundRect">
+            <a:avLst>
+              <a:gd name="adj" fmla="val 4000"/>
+            </a:avLst>
+          </a:prstGeom>
+          <a:noFill/>
+          <a:ln w="9525">
+            <a:solidFill>
+              <a:srgbClr val="26231F"/>
+            </a:solidFill>
+          </a:ln>
+        </p:spPr>
+        <p:txBody>
+          <a:bodyPr rtlCol="0" anchor="ctr"/>
+          <a:lstStyle/>
+          <a:p>
+            <a:pPr algn="ctr"/>
+          </a:p>
+        </p:txBody>
+      </p:sp>
+      <p:sp>
+        <p:nvSpPr>
+          <p:cNvPr id="5" name="라벨"/>
+          <p:cNvSpPr txBox="1"/>
+          <p:nvPr/>
+        </p:nvSpPr>
+        <p:spPr>
+          <a:xfrm>
+            <a:off x="6827349" y="2148840"/>
+            <a:ext cx="4632844" cy="274320"/>
           </a:xfrm>
           <a:prstGeom prst="rect">
             <a:avLst/>
           </a:prstGeom>
-        </p:spPr>
-      </p:pic>
+          <a:noFill/>
+        </p:spPr>
+        <p:txBody>
+          <a:bodyPr wrap="square" lIns="54864" rIns="54864" tIns="27432" bIns="27432" anchor="t">
+            <a:noAutofit/>
+          </a:bodyPr>
+          <a:lstStyle/>
+          <a:p>
+            <a:pPr algn="l">
+              <a:lnSpc>
+                <a:spcPct val="115000"/>
+              </a:lnSpc>
+            </a:pPr>
+            <a:r>
+              <a:rPr sz="1000" b="1" i="0" spc="250">
+                <a:solidFill>
+                  <a:srgbClr val="26231F"/>
+                </a:solidFill>
+              </a:rPr>
+              <a:t>FIRST BIRTHDAY</a:t>
+            </a:r>
+          </a:p>
+        </p:txBody>
+      </p:sp>
       <p:sp>
         <p:nvSpPr>
           <p:cNvPr id="2" name="Title 1"/>
@@ -5693,8 +6260,8 @@
         </p:nvSpPr>
         <p:spPr>
           <a:xfrm>
-            <a:off x="853418" y="2057400"/>
-            <a:ext cx="6095847" cy="1554480"/>
+            <a:off x="6827349" y="2606040"/>
+            <a:ext cx="4632844" cy="1188720"/>
           </a:xfrm>
         </p:spPr>
         <p:txBody>
@@ -5711,7 +6278,7 @@
             <a:r>
               <a:rPr sz="3400" b="1" i="0">
                 <a:solidFill>
-                  <a:srgbClr val="715214"/>
+                  <a:srgbClr val="26231F"/>
                 </a:solidFill>
               </a:rPr>
               <a:t>와 주셔서 고맙습니다</a:t>
@@ -5721,14 +6288,14 @@
       </p:sp>
       <p:sp>
         <p:nvSpPr>
-          <p:cNvPr id="4" name="한 줄 문구"/>
+          <p:cNvPr id="6" name="한 줄 문구"/>
           <p:cNvSpPr txBox="1"/>
           <p:nvPr/>
         </p:nvSpPr>
         <p:spPr>
           <a:xfrm>
-            <a:off x="853418" y="3749039"/>
-            <a:ext cx="6095847" cy="822960"/>
+            <a:off x="6827349" y="3886200"/>
+            <a:ext cx="4632844" cy="822960"/>
           </a:xfrm>
           <a:prstGeom prst="rect">
             <a:avLst/>
@@ -5747,9 +6314,9 @@
               </a:lnSpc>
             </a:pPr>
             <a:r>
-              <a:rPr sz="1700" b="0" i="1">
+              <a:rPr sz="1700" b="0" i="0">
                 <a:solidFill>
-                  <a:srgbClr val="715214"/>
+                  <a:srgbClr val="26231F"/>
                 </a:solidFill>
               </a:rPr>
               <a:t>아이가 한 살이 되었습니다</a:t>
@@ -5759,14 +6326,14 @@
       </p:sp>
       <p:sp>
         <p:nvSpPr>
-          <p:cNvPr id="5" name="안내 문구"/>
+          <p:cNvPr id="7" name="안내 문구"/>
           <p:cNvSpPr txBox="1"/>
           <p:nvPr/>
         </p:nvSpPr>
         <p:spPr>
           <a:xfrm>
-            <a:off x="853418" y="4617720"/>
-            <a:ext cx="6095847" cy="914400"/>
+            <a:off x="6827349" y="4754880"/>
+            <a:ext cx="4632844" cy="914400"/>
           </a:xfrm>
           <a:prstGeom prst="rect">
             <a:avLst/>
@@ -5787,7 +6354,7 @@
             <a:r>
               <a:rPr sz="1400" b="0" i="0">
                 <a:solidFill>
-                  <a:srgbClr val="666666"/>
+                  <a:srgbClr val="26231F"/>
                 </a:solidFill>
               </a:rPr>
               <a:t>아기 이름 · 부모 이름</a:t>
@@ -5814,34 +6381,34 @@
         <a:sysClr val="window" lastClr="FFFFFF"/>
       </a:lt1>
       <a:dk2>
-        <a:srgbClr val="715214"/>
+        <a:srgbClr val="493E27"/>
       </a:dk2>
       <a:lt2>
-        <a:srgbClr val="FCF7EE"/>
+        <a:srgbClr val="FBF6EC"/>
       </a:lt2>
       <a:accent1>
-        <a:srgbClr val="C79123"/>
+        <a:srgbClr val="D8B879"/>
       </a:accent1>
       <a:accent2>
-        <a:srgbClr val="3B8391"/>
+        <a:srgbClr val="D7E198"/>
       </a:accent2>
       <a:accent3>
-        <a:srgbClr val="715214"/>
+        <a:srgbClr val="493E27"/>
       </a:accent3>
       <a:accent4>
-        <a:srgbClr val="F7E8C9"/>
+        <a:srgbClr val="F6EBD5"/>
       </a:accent4>
       <a:accent5>
-        <a:srgbClr val="818A5A"/>
+        <a:srgbClr val="D8CC88"/>
       </a:accent5>
       <a:accent6>
-        <a:srgbClr val="AA9772"/>
+        <a:srgbClr val="928B7D"/>
       </a:accent6>
       <a:hlink>
-        <a:srgbClr val="C79123"/>
+        <a:srgbClr val="D8B879"/>
       </a:hlink>
       <a:folHlink>
-        <a:srgbClr val="715214"/>
+        <a:srgbClr val="493E27"/>
       </a:folHlink>
     </a:clrScheme>
     <a:fontScheme name="Office">
